--- a/public/fun/pack/pptx/wedding/결혼식_15_감사·답례중심_수국화단.pptx
+++ b/public/fun/pack/pptx/wedding/결혼식_15_감사·답례중심_수국화단.pptx
@@ -3347,7 +3347,7 @@
             <a:r>
               <a:rPr sz="3600" b="1" i="0">
                 <a:solidFill>
-                  <a:srgbClr val="47347F"/>
+                  <a:srgbClr val="24115F"/>
                 </a:solidFill>
               </a:rPr>
               <a:t>저희 결혼합니다</a:t>
@@ -3385,7 +3385,7 @@
             <a:r>
               <a:rPr sz="1700" b="0" i="1">
                 <a:solidFill>
-                  <a:srgbClr val="47347F"/>
+                  <a:srgbClr val="24115F"/>
                 </a:solidFill>
               </a:rPr>
               <a:t>작은 답례품을 준비했습니다</a:t>
@@ -3487,7 +3487,7 @@
             <a:avLst/>
           </a:prstGeom>
           <a:solidFill>
-            <a:srgbClr val="D9D2EF"/>
+            <a:srgbClr val="DBD1FA"/>
           </a:solidFill>
           <a:ln>
             <a:noFill/>
@@ -3516,7 +3516,7 @@
             <a:avLst/>
           </a:prstGeom>
           <a:solidFill>
-            <a:srgbClr val="745CBC"/>
+            <a:srgbClr val="4D26C5"/>
           </a:solidFill>
           <a:ln>
             <a:noFill/>
@@ -3560,7 +3560,7 @@
             <a:r>
               <a:rPr sz="3000" b="1" i="0">
                 <a:solidFill>
-                  <a:srgbClr val="47347F"/>
+                  <a:srgbClr val="24115F"/>
                 </a:solidFill>
               </a:rPr>
               <a:t>신랑 · 신부 소개</a:t>
@@ -3583,11 +3583,11 @@
             <a:avLst/>
           </a:prstGeom>
           <a:solidFill>
-            <a:srgbClr val="D9D2EF"/>
+            <a:srgbClr val="DBD1FA"/>
           </a:solidFill>
           <a:ln w="19050">
             <a:solidFill>
-              <a:srgbClr val="745CBC"/>
+              <a:srgbClr val="4D26C5"/>
             </a:solidFill>
             <a:prstDash val="dash"/>
           </a:ln>
@@ -3606,7 +3606,7 @@
             <a:r>
               <a:rPr sz="1200" b="0" i="0">
                 <a:solidFill>
-                  <a:srgbClr val="47347F"/>
+                  <a:srgbClr val="24115F"/>
                 </a:solidFill>
               </a:rPr>
               <a:t>사진</a:t>
@@ -3644,7 +3644,7 @@
             <a:r>
               <a:rPr sz="1600" b="1" i="0">
                 <a:solidFill>
-                  <a:srgbClr val="47347F"/>
+                  <a:srgbClr val="24115F"/>
                 </a:solidFill>
               </a:rPr>
               <a:t>신랑</a:t>
@@ -3735,11 +3735,11 @@
             <a:avLst/>
           </a:prstGeom>
           <a:solidFill>
-            <a:srgbClr val="D9D2EF"/>
+            <a:srgbClr val="DBD1FA"/>
           </a:solidFill>
           <a:ln w="19050">
             <a:solidFill>
-              <a:srgbClr val="745CBC"/>
+              <a:srgbClr val="4D26C5"/>
             </a:solidFill>
             <a:prstDash val="dash"/>
           </a:ln>
@@ -3758,7 +3758,7 @@
             <a:r>
               <a:rPr sz="1200" b="0" i="0">
                 <a:solidFill>
-                  <a:srgbClr val="47347F"/>
+                  <a:srgbClr val="24115F"/>
                 </a:solidFill>
               </a:rPr>
               <a:t>사진</a:t>
@@ -3796,7 +3796,7 @@
             <a:r>
               <a:rPr sz="1600" b="1" i="0">
                 <a:solidFill>
-                  <a:srgbClr val="47347F"/>
+                  <a:srgbClr val="24115F"/>
                 </a:solidFill>
               </a:rPr>
               <a:t>신부</a:t>
@@ -3913,7 +3913,7 @@
             <a:avLst/>
           </a:prstGeom>
           <a:solidFill>
-            <a:srgbClr val="D9D2EF"/>
+            <a:srgbClr val="DBD1FA"/>
           </a:solidFill>
           <a:ln>
             <a:noFill/>
@@ -3942,7 +3942,7 @@
             <a:avLst/>
           </a:prstGeom>
           <a:solidFill>
-            <a:srgbClr val="745CBC"/>
+            <a:srgbClr val="4D26C5"/>
           </a:solidFill>
           <a:ln>
             <a:noFill/>
@@ -3986,7 +3986,7 @@
             <a:r>
               <a:rPr sz="3000" b="1" i="0">
                 <a:solidFill>
-                  <a:srgbClr val="47347F"/>
+                  <a:srgbClr val="24115F"/>
                 </a:solidFill>
               </a:rPr>
               <a:t>감사의 말씀</a:t>
@@ -4011,11 +4011,11 @@
             </a:avLst>
           </a:prstGeom>
           <a:solidFill>
-            <a:srgbClr val="F3F1F9"/>
+            <a:srgbClr val="F1EEFC"/>
           </a:solidFill>
           <a:ln w="12700">
             <a:solidFill>
-              <a:srgbClr val="D9D2EF"/>
+              <a:srgbClr val="DBD1FA"/>
             </a:solidFill>
           </a:ln>
         </p:spPr>
@@ -4181,7 +4181,7 @@
             <a:avLst/>
           </a:prstGeom>
           <a:solidFill>
-            <a:srgbClr val="D9D2EF"/>
+            <a:srgbClr val="DBD1FA"/>
           </a:solidFill>
           <a:ln>
             <a:noFill/>
@@ -4210,7 +4210,7 @@
             <a:avLst/>
           </a:prstGeom>
           <a:solidFill>
-            <a:srgbClr val="745CBC"/>
+            <a:srgbClr val="4D26C5"/>
           </a:solidFill>
           <a:ln>
             <a:noFill/>
@@ -4254,7 +4254,7 @@
             <a:r>
               <a:rPr sz="3000" b="1" i="0">
                 <a:solidFill>
-                  <a:srgbClr val="47347F"/>
+                  <a:srgbClr val="24115F"/>
                 </a:solidFill>
               </a:rPr>
               <a:t>답례 안내</a:t>
@@ -4279,11 +4279,11 @@
             </a:avLst>
           </a:prstGeom>
           <a:solidFill>
-            <a:srgbClr val="F3F1F9"/>
+            <a:srgbClr val="F1EEFC"/>
           </a:solidFill>
           <a:ln w="15875">
             <a:solidFill>
-              <a:srgbClr val="D9D2EF"/>
+              <a:srgbClr val="DBD1FA"/>
             </a:solidFill>
           </a:ln>
         </p:spPr>
@@ -4310,7 +4310,7 @@
             <a:avLst/>
           </a:prstGeom>
           <a:solidFill>
-            <a:srgbClr val="745CBC"/>
+            <a:srgbClr val="4D26C5"/>
           </a:solidFill>
           <a:ln>
             <a:noFill/>
@@ -4368,7 +4368,7 @@
             <a:r>
               <a:rPr sz="1800" b="1" i="0">
                 <a:solidFill>
-                  <a:srgbClr val="47347F"/>
+                  <a:srgbClr val="24115F"/>
                 </a:solidFill>
               </a:rPr>
               <a:t>답례품</a:t>
@@ -4431,11 +4431,11 @@
             </a:avLst>
           </a:prstGeom>
           <a:solidFill>
-            <a:srgbClr val="F3F1F9"/>
+            <a:srgbClr val="F1EEFC"/>
           </a:solidFill>
           <a:ln w="15875">
             <a:solidFill>
-              <a:srgbClr val="D9D2EF"/>
+              <a:srgbClr val="DBD1FA"/>
             </a:solidFill>
           </a:ln>
         </p:spPr>
@@ -4462,7 +4462,7 @@
             <a:avLst/>
           </a:prstGeom>
           <a:solidFill>
-            <a:srgbClr val="745CBC"/>
+            <a:srgbClr val="4D26C5"/>
           </a:solidFill>
           <a:ln>
             <a:noFill/>
@@ -4520,7 +4520,7 @@
             <a:r>
               <a:rPr sz="1800" b="1" i="0">
                 <a:solidFill>
-                  <a:srgbClr val="47347F"/>
+                  <a:srgbClr val="24115F"/>
                 </a:solidFill>
               </a:rPr>
               <a:t>방명록</a:t>
@@ -4583,11 +4583,11 @@
             </a:avLst>
           </a:prstGeom>
           <a:solidFill>
-            <a:srgbClr val="F3F1F9"/>
+            <a:srgbClr val="F1EEFC"/>
           </a:solidFill>
           <a:ln w="15875">
             <a:solidFill>
-              <a:srgbClr val="D9D2EF"/>
+              <a:srgbClr val="DBD1FA"/>
             </a:solidFill>
           </a:ln>
         </p:spPr>
@@ -4614,7 +4614,7 @@
             <a:avLst/>
           </a:prstGeom>
           <a:solidFill>
-            <a:srgbClr val="745CBC"/>
+            <a:srgbClr val="4D26C5"/>
           </a:solidFill>
           <a:ln>
             <a:noFill/>
@@ -4672,7 +4672,7 @@
             <a:r>
               <a:rPr sz="1800" b="1" i="0">
                 <a:solidFill>
-                  <a:srgbClr val="47347F"/>
+                  <a:srgbClr val="24115F"/>
                 </a:solidFill>
               </a:rPr>
               <a:t>사진 · 영상</a:t>
@@ -4759,7 +4759,7 @@
             <a:avLst/>
           </a:prstGeom>
           <a:solidFill>
-            <a:srgbClr val="D9D2EF"/>
+            <a:srgbClr val="DBD1FA"/>
           </a:solidFill>
           <a:ln>
             <a:noFill/>
@@ -4788,7 +4788,7 @@
             <a:avLst/>
           </a:prstGeom>
           <a:solidFill>
-            <a:srgbClr val="745CBC"/>
+            <a:srgbClr val="4D26C5"/>
           </a:solidFill>
           <a:ln>
             <a:noFill/>
@@ -4832,7 +4832,7 @@
             <a:r>
               <a:rPr sz="3000" b="1" i="0">
                 <a:solidFill>
-                  <a:srgbClr val="47347F"/>
+                  <a:srgbClr val="24115F"/>
                 </a:solidFill>
               </a:rPr>
               <a:t>웨딩 사진</a:t>
@@ -4857,11 +4857,11 @@
             </a:avLst>
           </a:prstGeom>
           <a:solidFill>
-            <a:srgbClr val="D9D2EF"/>
+            <a:srgbClr val="DBD1FA"/>
           </a:solidFill>
           <a:ln w="19050">
             <a:solidFill>
-              <a:srgbClr val="745CBC"/>
+              <a:srgbClr val="4D26C5"/>
             </a:solidFill>
             <a:prstDash val="dash"/>
           </a:ln>
@@ -4880,7 +4880,7 @@
             <a:r>
               <a:rPr sz="1200" b="0" i="0">
                 <a:solidFill>
-                  <a:srgbClr val="47347F"/>
+                  <a:srgbClr val="24115F"/>
                 </a:solidFill>
               </a:rPr>
               <a:t>사진 1</a:t>
@@ -4905,11 +4905,11 @@
             </a:avLst>
           </a:prstGeom>
           <a:solidFill>
-            <a:srgbClr val="D9D2EF"/>
+            <a:srgbClr val="DBD1FA"/>
           </a:solidFill>
           <a:ln w="19050">
             <a:solidFill>
-              <a:srgbClr val="745CBC"/>
+              <a:srgbClr val="4D26C5"/>
             </a:solidFill>
             <a:prstDash val="dash"/>
           </a:ln>
@@ -4928,7 +4928,7 @@
             <a:r>
               <a:rPr sz="1200" b="0" i="0">
                 <a:solidFill>
-                  <a:srgbClr val="47347F"/>
+                  <a:srgbClr val="24115F"/>
                 </a:solidFill>
               </a:rPr>
               <a:t>사진 2</a:t>
@@ -4953,11 +4953,11 @@
             </a:avLst>
           </a:prstGeom>
           <a:solidFill>
-            <a:srgbClr val="D9D2EF"/>
+            <a:srgbClr val="DBD1FA"/>
           </a:solidFill>
           <a:ln w="19050">
             <a:solidFill>
-              <a:srgbClr val="745CBC"/>
+              <a:srgbClr val="4D26C5"/>
             </a:solidFill>
             <a:prstDash val="dash"/>
           </a:ln>
@@ -4976,7 +4976,7 @@
             <a:r>
               <a:rPr sz="1200" b="0" i="0">
                 <a:solidFill>
-                  <a:srgbClr val="47347F"/>
+                  <a:srgbClr val="24115F"/>
                 </a:solidFill>
               </a:rPr>
               <a:t>사진 3</a:t>
@@ -5001,11 +5001,11 @@
             </a:avLst>
           </a:prstGeom>
           <a:solidFill>
-            <a:srgbClr val="D9D2EF"/>
+            <a:srgbClr val="DBD1FA"/>
           </a:solidFill>
           <a:ln w="19050">
             <a:solidFill>
-              <a:srgbClr val="745CBC"/>
+              <a:srgbClr val="4D26C5"/>
             </a:solidFill>
             <a:prstDash val="dash"/>
           </a:ln>
@@ -5024,7 +5024,7 @@
             <a:r>
               <a:rPr sz="1200" b="0" i="0">
                 <a:solidFill>
-                  <a:srgbClr val="47347F"/>
+                  <a:srgbClr val="24115F"/>
                 </a:solidFill>
               </a:rPr>
               <a:t>사진 4</a:t>
@@ -5049,11 +5049,11 @@
             </a:avLst>
           </a:prstGeom>
           <a:solidFill>
-            <a:srgbClr val="D9D2EF"/>
+            <a:srgbClr val="DBD1FA"/>
           </a:solidFill>
           <a:ln w="19050">
             <a:solidFill>
-              <a:srgbClr val="745CBC"/>
+              <a:srgbClr val="4D26C5"/>
             </a:solidFill>
             <a:prstDash val="dash"/>
           </a:ln>
@@ -5072,7 +5072,7 @@
             <a:r>
               <a:rPr sz="1200" b="0" i="0">
                 <a:solidFill>
-                  <a:srgbClr val="47347F"/>
+                  <a:srgbClr val="24115F"/>
                 </a:solidFill>
               </a:rPr>
               <a:t>사진 5</a:t>
@@ -5097,11 +5097,11 @@
             </a:avLst>
           </a:prstGeom>
           <a:solidFill>
-            <a:srgbClr val="D9D2EF"/>
+            <a:srgbClr val="DBD1FA"/>
           </a:solidFill>
           <a:ln w="19050">
             <a:solidFill>
-              <a:srgbClr val="745CBC"/>
+              <a:srgbClr val="4D26C5"/>
             </a:solidFill>
             <a:prstDash val="dash"/>
           </a:ln>
@@ -5120,7 +5120,7 @@
             <a:r>
               <a:rPr sz="1200" b="0" i="0">
                 <a:solidFill>
-                  <a:srgbClr val="47347F"/>
+                  <a:srgbClr val="24115F"/>
                 </a:solidFill>
               </a:rPr>
               <a:t>사진 6</a:t>
@@ -5200,7 +5200,7 @@
             <a:r>
               <a:rPr sz="3400" b="1" i="0">
                 <a:solidFill>
-                  <a:srgbClr val="47347F"/>
+                  <a:srgbClr val="24115F"/>
                 </a:solidFill>
               </a:rPr>
               <a:t>와 주셔서 고맙습니다</a:t>
@@ -5238,7 +5238,7 @@
             <a:r>
               <a:rPr sz="1700" b="0" i="1">
                 <a:solidFill>
-                  <a:srgbClr val="47347F"/>
+                  <a:srgbClr val="24115F"/>
                 </a:solidFill>
               </a:rPr>
               <a:t>잘 살겠습니다</a:t>
@@ -5303,34 +5303,34 @@
         <a:sysClr val="window" lastClr="FFFFFF"/>
       </a:lt1>
       <a:dk2>
-        <a:srgbClr val="47347F"/>
+        <a:srgbClr val="24115F"/>
       </a:dk2>
       <a:lt2>
-        <a:srgbClr val="F3F1F9"/>
+        <a:srgbClr val="F1EEFC"/>
       </a:lt2>
       <a:accent1>
-        <a:srgbClr val="745CBC"/>
+        <a:srgbClr val="4D26C5"/>
       </a:accent1>
       <a:accent2>
-        <a:srgbClr val="917B3B"/>
+        <a:srgbClr val="209DB6"/>
       </a:accent2>
       <a:accent3>
-        <a:srgbClr val="47347F"/>
+        <a:srgbClr val="24115F"/>
       </a:accent3>
       <a:accent4>
-        <a:srgbClr val="D9D2EF"/>
+        <a:srgbClr val="DBD1FA"/>
       </a:accent4>
       <a:accent5>
-        <a:srgbClr val="826C7C"/>
+        <a:srgbClr val="3662BE"/>
       </a:accent5>
       <a:accent6>
-        <a:srgbClr val="9185B2"/>
+        <a:srgbClr val="7C709F"/>
       </a:accent6>
       <a:hlink>
-        <a:srgbClr val="745CBC"/>
+        <a:srgbClr val="4D26C5"/>
       </a:hlink>
       <a:folHlink>
-        <a:srgbClr val="47347F"/>
+        <a:srgbClr val="24115F"/>
       </a:folHlink>
     </a:clrScheme>
     <a:fontScheme name="Office">

--- a/public/fun/pack/pptx/wedding/결혼식_15_감사·답례중심_수국화단.pptx
+++ b/public/fun/pack/pptx/wedding/결혼식_15_감사·답례중심_수국화단.pptx
@@ -3286,6 +3286,14 @@
 <file path=ppt/slides/slide1.xml><?xml version="1.0" encoding="utf-8"?>
 <p:sld xmlns:a="http://schemas.openxmlformats.org/drawingml/2006/main" xmlns:p="http://schemas.openxmlformats.org/presentationml/2006/main" xmlns:r="http://schemas.openxmlformats.org/officeDocument/2006/relationships">
   <p:cSld>
+    <p:bg>
+      <p:bgPr>
+        <a:solidFill>
+          <a:srgbClr val="EFEAFD"/>
+        </a:solidFill>
+        <a:effectLst/>
+      </p:bgPr>
+    </p:bg>
     <p:spTree>
       <p:nvGrpSpPr>
         <p:cNvPr id="1" name=""/>
@@ -3293,30 +3301,119 @@
         <p:nvPr/>
       </p:nvGrpSpPr>
       <p:grpSpPr/>
-      <p:pic>
-        <p:nvPicPr>
-          <p:cNvPr id="3" name="표지 그림" descr="wedding-15.jpg"/>
-          <p:cNvPicPr>
-            <a:picLocks noChangeAspect="1"/>
-          </p:cNvPicPr>
+      <p:sp>
+        <p:nvSpPr>
+          <p:cNvPr id="3" name="사진 자리"/>
+          <p:cNvSpPr/>
           <p:nvPr/>
-        </p:nvPicPr>
-        <p:blipFill>
-          <a:blip r:embed="rId2"/>
-          <a:stretch>
-            <a:fillRect/>
-          </a:stretch>
-        </p:blipFill>
-        <p:spPr>
-          <a:xfrm>
-            <a:off x="0" y="0"/>
-            <a:ext cx="12191695" cy="6858000"/>
+        </p:nvSpPr>
+        <p:spPr>
+          <a:xfrm>
+            <a:off x="1463003" y="685800"/>
+            <a:ext cx="3169840" cy="5486400"/>
+          </a:xfrm>
+          <a:prstGeom prst="round2SameRect">
+            <a:avLst>
+              <a:gd name="adj1" fmla="val 50000"/>
+              <a:gd name="adj2" fmla="val 0"/>
+            </a:avLst>
+          </a:prstGeom>
+          <a:solidFill>
+            <a:srgbClr val="B8A5F3"/>
+          </a:solidFill>
+          <a:ln>
+            <a:noFill/>
+          </a:ln>
+        </p:spPr>
+        <p:txBody>
+          <a:bodyPr rtlCol="0" anchor="ctr" wrap="square" lIns="54864" rIns="54864" tIns="27432" bIns="27432">
+            <a:noAutofit/>
+          </a:bodyPr>
+          <a:lstStyle/>
+          <a:p>
+            <a:pPr algn="ctr">
+              <a:lnSpc>
+                <a:spcPct val="100000"/>
+              </a:lnSpc>
+            </a:pPr>
+            <a:r>
+              <a:rPr sz="1400" b="0" i="0">
+                <a:solidFill>
+                  <a:srgbClr val="302749"/>
+                </a:solidFill>
+              </a:rPr>
+              <a:t>사진을 넣어 주세요</a:t>
+            </a:r>
+          </a:p>
+        </p:txBody>
+      </p:sp>
+      <p:sp>
+        <p:nvSpPr>
+          <p:cNvPr id="4" name="장식"/>
+          <p:cNvSpPr/>
+          <p:nvPr/>
+        </p:nvSpPr>
+        <p:spPr>
+          <a:xfrm>
+            <a:off x="4358505" y="4251960"/>
+            <a:ext cx="1005840" cy="1005840"/>
+          </a:xfrm>
+          <a:prstGeom prst="ellipse">
+            <a:avLst/>
+          </a:prstGeom>
+          <a:solidFill>
+            <a:srgbClr val="B8A5F3"/>
+          </a:solidFill>
+          <a:ln>
+            <a:noFill/>
+          </a:ln>
+        </p:spPr>
+        <p:txBody>
+          <a:bodyPr rtlCol="0" anchor="ctr"/>
+          <a:lstStyle/>
+          <a:p>
+            <a:pPr algn="ctr"/>
+          </a:p>
+        </p:txBody>
+      </p:sp>
+      <p:sp>
+        <p:nvSpPr>
+          <p:cNvPr id="5" name="라벨"/>
+          <p:cNvSpPr txBox="1"/>
+          <p:nvPr/>
+        </p:nvSpPr>
+        <p:spPr>
+          <a:xfrm>
+            <a:off x="6827349" y="2148840"/>
+            <a:ext cx="4632844" cy="274320"/>
           </a:xfrm>
           <a:prstGeom prst="rect">
             <a:avLst/>
           </a:prstGeom>
-        </p:spPr>
-      </p:pic>
+          <a:noFill/>
+        </p:spPr>
+        <p:txBody>
+          <a:bodyPr wrap="square" lIns="54864" rIns="54864" tIns="27432" bIns="27432" anchor="t">
+            <a:noAutofit/>
+          </a:bodyPr>
+          <a:lstStyle/>
+          <a:p>
+            <a:pPr algn="l">
+              <a:lnSpc>
+                <a:spcPct val="115000"/>
+              </a:lnSpc>
+            </a:pPr>
+            <a:r>
+              <a:rPr sz="1000" b="1" i="0" spc="250">
+                <a:solidFill>
+                  <a:srgbClr val="26231F"/>
+                </a:solidFill>
+              </a:rPr>
+              <a:t>WEDDING</a:t>
+            </a:r>
+          </a:p>
+        </p:txBody>
+      </p:sp>
       <p:sp>
         <p:nvSpPr>
           <p:cNvPr id="2" name="Title 1"/>
@@ -3329,8 +3426,8 @@
         </p:nvSpPr>
         <p:spPr>
           <a:xfrm>
-            <a:off x="853418" y="2057400"/>
-            <a:ext cx="6095847" cy="1554480"/>
+            <a:off x="6827349" y="2606040"/>
+            <a:ext cx="4632844" cy="1188720"/>
           </a:xfrm>
         </p:spPr>
         <p:txBody>
@@ -3347,7 +3444,7 @@
             <a:r>
               <a:rPr sz="3600" b="1" i="0">
                 <a:solidFill>
-                  <a:srgbClr val="24115F"/>
+                  <a:srgbClr val="26231F"/>
                 </a:solidFill>
               </a:rPr>
               <a:t>저희 결혼합니다</a:t>
@@ -3357,14 +3454,14 @@
       </p:sp>
       <p:sp>
         <p:nvSpPr>
-          <p:cNvPr id="4" name="한 줄 문구"/>
+          <p:cNvPr id="6" name="한 줄 문구"/>
           <p:cNvSpPr txBox="1"/>
           <p:nvPr/>
         </p:nvSpPr>
         <p:spPr>
           <a:xfrm>
-            <a:off x="853418" y="3749039"/>
-            <a:ext cx="6095847" cy="822960"/>
+            <a:off x="6827349" y="3886200"/>
+            <a:ext cx="4632844" cy="822960"/>
           </a:xfrm>
           <a:prstGeom prst="rect">
             <a:avLst/>
@@ -3383,9 +3480,9 @@
               </a:lnSpc>
             </a:pPr>
             <a:r>
-              <a:rPr sz="1700" b="0" i="1">
-                <a:solidFill>
-                  <a:srgbClr val="24115F"/>
+              <a:rPr sz="1700" b="0" i="0">
+                <a:solidFill>
+                  <a:srgbClr val="26231F"/>
                 </a:solidFill>
               </a:rPr>
               <a:t>작은 답례품을 준비했습니다</a:t>
@@ -3395,14 +3492,14 @@
       </p:sp>
       <p:sp>
         <p:nvSpPr>
-          <p:cNvPr id="5" name="안내 문구"/>
+          <p:cNvPr id="7" name="안내 문구"/>
           <p:cNvSpPr txBox="1"/>
           <p:nvPr/>
         </p:nvSpPr>
         <p:spPr>
           <a:xfrm>
-            <a:off x="853418" y="4617720"/>
-            <a:ext cx="6095847" cy="914400"/>
+            <a:off x="6827349" y="4754880"/>
+            <a:ext cx="4632844" cy="914400"/>
           </a:xfrm>
           <a:prstGeom prst="rect">
             <a:avLst/>
@@ -3423,7 +3520,7 @@
             <a:r>
               <a:rPr sz="1400" b="0" i="0">
                 <a:solidFill>
-                  <a:srgbClr val="666666"/>
+                  <a:srgbClr val="26231F"/>
                 </a:solidFill>
               </a:rPr>
               <a:t>신랑 이름 ♥ 신부 이름</a:t>
@@ -3438,10 +3535,10 @@
             <a:r>
               <a:rPr sz="1400" b="0" i="0">
                 <a:solidFill>
-                  <a:srgbClr val="666666"/>
+                  <a:srgbClr val="26231F"/>
                 </a:solidFill>
               </a:rPr>
-              <a:t>2027. 00. 00 · 예식장 이름</a:t>
+              <a:t>날짜 입력 · 예식장 이름</a:t>
             </a:r>
           </a:p>
         </p:txBody>
@@ -3480,14 +3577,14 @@
         </p:nvSpPr>
         <p:spPr>
           <a:xfrm>
-            <a:off x="-182880" y="6144768"/>
-            <a:ext cx="12557455" cy="731520"/>
-          </a:xfrm>
-          <a:prstGeom prst="wave">
+            <a:off x="640080" y="6400800"/>
+            <a:ext cx="10911535" cy="10972"/>
+          </a:xfrm>
+          <a:prstGeom prst="rect">
             <a:avLst/>
           </a:prstGeom>
           <a:solidFill>
-            <a:srgbClr val="DBD1FA"/>
+            <a:srgbClr val="26231F"/>
           </a:solidFill>
           <a:ln>
             <a:noFill/>
@@ -3503,20 +3600,58 @@
       </p:sp>
       <p:sp>
         <p:nvSpPr>
-          <p:cNvPr id="4" name="장식"/>
+          <p:cNvPr id="4" name="하단 라벨"/>
+          <p:cNvSpPr txBox="1"/>
+          <p:nvPr/>
+        </p:nvSpPr>
+        <p:spPr>
+          <a:xfrm>
+            <a:off x="640080" y="6437376"/>
+            <a:ext cx="5486400" cy="274320"/>
+          </a:xfrm>
+          <a:prstGeom prst="rect">
+            <a:avLst/>
+          </a:prstGeom>
+          <a:noFill/>
+        </p:spPr>
+        <p:txBody>
+          <a:bodyPr wrap="square" lIns="54864" rIns="54864" tIns="27432" bIns="27432" anchor="ctr">
+            <a:noAutofit/>
+          </a:bodyPr>
+          <a:lstStyle/>
+          <a:p>
+            <a:pPr algn="l">
+              <a:lnSpc>
+                <a:spcPct val="115000"/>
+              </a:lnSpc>
+            </a:pPr>
+            <a:r>
+              <a:rPr sz="900" b="1" i="0" spc="250">
+                <a:solidFill>
+                  <a:srgbClr val="26231F"/>
+                </a:solidFill>
+              </a:rPr>
+              <a:t>WEDDING</a:t>
+            </a:r>
+          </a:p>
+        </p:txBody>
+      </p:sp>
+      <p:sp>
+        <p:nvSpPr>
+          <p:cNvPr id="5" name="포인트"/>
           <p:cNvSpPr/>
           <p:nvPr/>
         </p:nvSpPr>
         <p:spPr>
           <a:xfrm>
-            <a:off x="-182880" y="6400800"/>
-            <a:ext cx="12557455" cy="502920"/>
-          </a:xfrm>
-          <a:prstGeom prst="wave">
+            <a:off x="11213287" y="6473952"/>
+            <a:ext cx="219456" cy="219456"/>
+          </a:xfrm>
+          <a:prstGeom prst="donut">
             <a:avLst/>
           </a:prstGeom>
           <a:solidFill>
-            <a:srgbClr val="4D26C5"/>
+            <a:srgbClr val="977BEA"/>
           </a:solidFill>
           <a:ln>
             <a:noFill/>
@@ -3542,8 +3677,8 @@
         </p:nvSpPr>
         <p:spPr>
           <a:xfrm>
-            <a:off x="640080" y="457200"/>
-            <a:ext cx="9722815" cy="868680"/>
+            <a:off x="640080" y="502920"/>
+            <a:ext cx="10911535" cy="914400"/>
           </a:xfrm>
         </p:spPr>
         <p:txBody>
@@ -3560,7 +3695,7 @@
             <a:r>
               <a:rPr sz="3000" b="1" i="0">
                 <a:solidFill>
-                  <a:srgbClr val="24115F"/>
+                  <a:srgbClr val="26231F"/>
                 </a:solidFill>
               </a:rPr>
               <a:t>신랑 · 신부 소개</a:t>
@@ -3570,14 +3705,14 @@
       </p:sp>
       <p:sp>
         <p:nvSpPr>
-          <p:cNvPr id="5" name="사진 자리"/>
+          <p:cNvPr id="6" name="사진 자리"/>
           <p:cNvSpPr/>
           <p:nvPr/>
         </p:nvSpPr>
         <p:spPr>
           <a:xfrm>
-            <a:off x="2042083" y="1554480"/>
-            <a:ext cx="2194560" cy="2194560"/>
+            <a:off x="1996363" y="1600200"/>
+            <a:ext cx="2286000" cy="2286000"/>
           </a:xfrm>
           <a:prstGeom prst="ellipse">
             <a:avLst/>
@@ -3586,9 +3721,7 @@
             <a:srgbClr val="DBD1FA"/>
           </a:solidFill>
           <a:ln w="19050">
-            <a:solidFill>
-              <a:srgbClr val="4D26C5"/>
-            </a:solidFill>
+            <a:noFill/>
             <a:prstDash val="dash"/>
           </a:ln>
         </p:spPr>
@@ -3606,7 +3739,7 @@
             <a:r>
               <a:rPr sz="1200" b="0" i="0">
                 <a:solidFill>
-                  <a:srgbClr val="24115F"/>
+                  <a:srgbClr val="8E8780"/>
                 </a:solidFill>
               </a:rPr>
               <a:t>사진</a:t>
@@ -3616,13 +3749,13 @@
       </p:sp>
       <p:sp>
         <p:nvSpPr>
-          <p:cNvPr id="6" name="TextBox 5"/>
+          <p:cNvPr id="7" name="TextBox 6"/>
           <p:cNvSpPr txBox="1"/>
           <p:nvPr/>
         </p:nvSpPr>
         <p:spPr>
           <a:xfrm>
-            <a:off x="640080" y="3840479"/>
+            <a:off x="640080" y="3977639"/>
             <a:ext cx="4998567" cy="411480"/>
           </a:xfrm>
           <a:prstGeom prst="rect">
@@ -3644,7 +3777,7 @@
             <a:r>
               <a:rPr sz="1600" b="1" i="0">
                 <a:solidFill>
-                  <a:srgbClr val="24115F"/>
+                  <a:srgbClr val="302749"/>
                 </a:solidFill>
               </a:rPr>
               <a:t>신랑</a:t>
@@ -3654,14 +3787,14 @@
       </p:sp>
       <p:sp>
         <p:nvSpPr>
-          <p:cNvPr id="7" name="TextBox 6"/>
+          <p:cNvPr id="8" name="TextBox 7"/>
           <p:cNvSpPr txBox="1"/>
           <p:nvPr/>
         </p:nvSpPr>
         <p:spPr>
           <a:xfrm>
-            <a:off x="731519" y="4297679"/>
-            <a:ext cx="4815687" cy="1645919"/>
+            <a:off x="731519" y="4434840"/>
+            <a:ext cx="4815687" cy="1737360"/>
           </a:xfrm>
           <a:prstGeom prst="rect">
             <a:avLst/>
@@ -3722,14 +3855,14 @@
       </p:sp>
       <p:sp>
         <p:nvSpPr>
-          <p:cNvPr id="8" name="사진 자리"/>
+          <p:cNvPr id="9" name="사진 자리"/>
           <p:cNvSpPr/>
           <p:nvPr/>
         </p:nvSpPr>
         <p:spPr>
           <a:xfrm>
-            <a:off x="7955051" y="1554480"/>
-            <a:ext cx="2194560" cy="2194560"/>
+            <a:off x="7909331" y="1600200"/>
+            <a:ext cx="2286000" cy="2286000"/>
           </a:xfrm>
           <a:prstGeom prst="ellipse">
             <a:avLst/>
@@ -3738,9 +3871,7 @@
             <a:srgbClr val="DBD1FA"/>
           </a:solidFill>
           <a:ln w="19050">
-            <a:solidFill>
-              <a:srgbClr val="4D26C5"/>
-            </a:solidFill>
+            <a:noFill/>
             <a:prstDash val="dash"/>
           </a:ln>
         </p:spPr>
@@ -3758,7 +3889,7 @@
             <a:r>
               <a:rPr sz="1200" b="0" i="0">
                 <a:solidFill>
-                  <a:srgbClr val="24115F"/>
+                  <a:srgbClr val="8E8780"/>
                 </a:solidFill>
               </a:rPr>
               <a:t>사진</a:t>
@@ -3768,13 +3899,13 @@
       </p:sp>
       <p:sp>
         <p:nvSpPr>
-          <p:cNvPr id="9" name="TextBox 8"/>
+          <p:cNvPr id="10" name="TextBox 9"/>
           <p:cNvSpPr txBox="1"/>
           <p:nvPr/>
         </p:nvSpPr>
         <p:spPr>
           <a:xfrm>
-            <a:off x="6553047" y="3840479"/>
+            <a:off x="6553047" y="3977639"/>
             <a:ext cx="4998567" cy="411480"/>
           </a:xfrm>
           <a:prstGeom prst="rect">
@@ -3796,7 +3927,7 @@
             <a:r>
               <a:rPr sz="1600" b="1" i="0">
                 <a:solidFill>
-                  <a:srgbClr val="24115F"/>
+                  <a:srgbClr val="302749"/>
                 </a:solidFill>
               </a:rPr>
               <a:t>신부</a:t>
@@ -3806,14 +3937,14 @@
       </p:sp>
       <p:sp>
         <p:nvSpPr>
-          <p:cNvPr id="10" name="TextBox 9"/>
+          <p:cNvPr id="11" name="TextBox 10"/>
           <p:cNvSpPr txBox="1"/>
           <p:nvPr/>
         </p:nvSpPr>
         <p:spPr>
           <a:xfrm>
-            <a:off x="6644487" y="4297679"/>
-            <a:ext cx="4815687" cy="1645919"/>
+            <a:off x="6644487" y="4434840"/>
+            <a:ext cx="4815687" cy="1737360"/>
           </a:xfrm>
           <a:prstGeom prst="rect">
             <a:avLst/>
@@ -3906,14 +4037,14 @@
         </p:nvSpPr>
         <p:spPr>
           <a:xfrm>
-            <a:off x="-182880" y="6144768"/>
-            <a:ext cx="12557455" cy="731520"/>
-          </a:xfrm>
-          <a:prstGeom prst="wave">
+            <a:off x="640080" y="6400800"/>
+            <a:ext cx="10911535" cy="10972"/>
+          </a:xfrm>
+          <a:prstGeom prst="rect">
             <a:avLst/>
           </a:prstGeom>
           <a:solidFill>
-            <a:srgbClr val="DBD1FA"/>
+            <a:srgbClr val="26231F"/>
           </a:solidFill>
           <a:ln>
             <a:noFill/>
@@ -3929,20 +4060,58 @@
       </p:sp>
       <p:sp>
         <p:nvSpPr>
-          <p:cNvPr id="4" name="장식"/>
+          <p:cNvPr id="4" name="하단 라벨"/>
+          <p:cNvSpPr txBox="1"/>
+          <p:nvPr/>
+        </p:nvSpPr>
+        <p:spPr>
+          <a:xfrm>
+            <a:off x="640080" y="6437376"/>
+            <a:ext cx="5486400" cy="274320"/>
+          </a:xfrm>
+          <a:prstGeom prst="rect">
+            <a:avLst/>
+          </a:prstGeom>
+          <a:noFill/>
+        </p:spPr>
+        <p:txBody>
+          <a:bodyPr wrap="square" lIns="54864" rIns="54864" tIns="27432" bIns="27432" anchor="ctr">
+            <a:noAutofit/>
+          </a:bodyPr>
+          <a:lstStyle/>
+          <a:p>
+            <a:pPr algn="l">
+              <a:lnSpc>
+                <a:spcPct val="115000"/>
+              </a:lnSpc>
+            </a:pPr>
+            <a:r>
+              <a:rPr sz="900" b="1" i="0" spc="250">
+                <a:solidFill>
+                  <a:srgbClr val="26231F"/>
+                </a:solidFill>
+              </a:rPr>
+              <a:t>WEDDING</a:t>
+            </a:r>
+          </a:p>
+        </p:txBody>
+      </p:sp>
+      <p:sp>
+        <p:nvSpPr>
+          <p:cNvPr id="5" name="포인트"/>
           <p:cNvSpPr/>
           <p:nvPr/>
         </p:nvSpPr>
         <p:spPr>
           <a:xfrm>
-            <a:off x="-182880" y="6400800"/>
-            <a:ext cx="12557455" cy="502920"/>
-          </a:xfrm>
-          <a:prstGeom prst="wave">
+            <a:off x="11213287" y="6473952"/>
+            <a:ext cx="219456" cy="219456"/>
+          </a:xfrm>
+          <a:prstGeom prst="donut">
             <a:avLst/>
           </a:prstGeom>
           <a:solidFill>
-            <a:srgbClr val="4D26C5"/>
+            <a:srgbClr val="977BEA"/>
           </a:solidFill>
           <a:ln>
             <a:noFill/>
@@ -3968,8 +4137,8 @@
         </p:nvSpPr>
         <p:spPr>
           <a:xfrm>
-            <a:off x="640080" y="457200"/>
-            <a:ext cx="9722815" cy="868680"/>
+            <a:off x="640080" y="502920"/>
+            <a:ext cx="10911535" cy="914400"/>
           </a:xfrm>
         </p:spPr>
         <p:txBody>
@@ -3986,7 +4155,7 @@
             <a:r>
               <a:rPr sz="3000" b="1" i="0">
                 <a:solidFill>
-                  <a:srgbClr val="24115F"/>
+                  <a:srgbClr val="26231F"/>
                 </a:solidFill>
               </a:rPr>
               <a:t>감사의 말씀</a:t>
@@ -3996,26 +4165,26 @@
       </p:sp>
       <p:sp>
         <p:nvSpPr>
-          <p:cNvPr id="5" name="감사 글 칸"/>
+          <p:cNvPr id="6" name="감사 글 칸"/>
           <p:cNvSpPr/>
           <p:nvPr/>
         </p:nvSpPr>
         <p:spPr>
           <a:xfrm>
-            <a:off x="640080" y="1554480"/>
-            <a:ext cx="10911535" cy="4389120"/>
+            <a:off x="640080" y="1600200"/>
+            <a:ext cx="10911535" cy="4572000"/>
           </a:xfrm>
           <a:prstGeom prst="roundRect">
             <a:avLst>
-              <a:gd name="adj" fmla="val 8000"/>
+              <a:gd name="adj" fmla="val 7000"/>
             </a:avLst>
           </a:prstGeom>
           <a:solidFill>
-            <a:srgbClr val="F1EEFC"/>
+            <a:srgbClr val="FFFFFF"/>
           </a:solidFill>
           <a:ln w="12700">
             <a:solidFill>
-              <a:srgbClr val="DBD1FA"/>
+              <a:srgbClr val="B8A5F3"/>
             </a:solidFill>
           </a:ln>
         </p:spPr>
@@ -4029,14 +4198,14 @@
       </p:sp>
       <p:sp>
         <p:nvSpPr>
-          <p:cNvPr id="6" name="감사 글"/>
+          <p:cNvPr id="7" name="감사 글"/>
           <p:cNvSpPr txBox="1"/>
           <p:nvPr/>
         </p:nvSpPr>
         <p:spPr>
           <a:xfrm>
-            <a:off x="1097280" y="1920240"/>
-            <a:ext cx="9997135" cy="3657600"/>
+            <a:off x="1097280" y="1965960"/>
+            <a:ext cx="9997135" cy="3840480"/>
           </a:xfrm>
           <a:prstGeom prst="rect">
             <a:avLst/>
@@ -4057,7 +4226,7 @@
             <a:r>
               <a:rPr sz="2000" b="0" i="0">
                 <a:solidFill>
-                  <a:srgbClr val="2B2B2B"/>
+                  <a:srgbClr val="26231F"/>
                 </a:solidFill>
               </a:rPr>
               <a:t>바쁘신 중에 와 주셔서 고맙습니다.</a:t>
@@ -4072,7 +4241,7 @@
             <a:r>
               <a:rPr sz="2000" b="0" i="0">
                 <a:solidFill>
-                  <a:srgbClr val="2B2B2B"/>
+                  <a:srgbClr val="26231F"/>
                 </a:solidFill>
               </a:rPr>
               <a:t/>
@@ -4087,7 +4256,7 @@
             <a:r>
               <a:rPr sz="2000" b="0" i="0">
                 <a:solidFill>
-                  <a:srgbClr val="2B2B2B"/>
+                  <a:srgbClr val="26231F"/>
                 </a:solidFill>
               </a:rPr>
               <a:t>보내 주신 마음 잊지 않고</a:t>
@@ -4102,7 +4271,7 @@
             <a:r>
               <a:rPr sz="2000" b="0" i="0">
                 <a:solidFill>
-                  <a:srgbClr val="2B2B2B"/>
+                  <a:srgbClr val="26231F"/>
                 </a:solidFill>
               </a:rPr>
               <a:t>잘 살겠습니다.</a:t>
@@ -4117,7 +4286,7 @@
             <a:r>
               <a:rPr sz="2000" b="0" i="0">
                 <a:solidFill>
-                  <a:srgbClr val="2B2B2B"/>
+                  <a:srgbClr val="26231F"/>
                 </a:solidFill>
               </a:rPr>
               <a:t/>
@@ -4132,7 +4301,7 @@
             <a:r>
               <a:rPr sz="2000" b="0" i="0">
                 <a:solidFill>
-                  <a:srgbClr val="2B2B2B"/>
+                  <a:srgbClr val="26231F"/>
                 </a:solidFill>
               </a:rPr>
               <a:t>신랑 · 신부 드림</a:t>
@@ -4174,14 +4343,14 @@
         </p:nvSpPr>
         <p:spPr>
           <a:xfrm>
-            <a:off x="-182880" y="6144768"/>
-            <a:ext cx="12557455" cy="731520"/>
-          </a:xfrm>
-          <a:prstGeom prst="wave">
+            <a:off x="640080" y="6400800"/>
+            <a:ext cx="10911535" cy="10972"/>
+          </a:xfrm>
+          <a:prstGeom prst="rect">
             <a:avLst/>
           </a:prstGeom>
           <a:solidFill>
-            <a:srgbClr val="DBD1FA"/>
+            <a:srgbClr val="26231F"/>
           </a:solidFill>
           <a:ln>
             <a:noFill/>
@@ -4197,20 +4366,58 @@
       </p:sp>
       <p:sp>
         <p:nvSpPr>
-          <p:cNvPr id="4" name="장식"/>
+          <p:cNvPr id="4" name="하단 라벨"/>
+          <p:cNvSpPr txBox="1"/>
+          <p:nvPr/>
+        </p:nvSpPr>
+        <p:spPr>
+          <a:xfrm>
+            <a:off x="640080" y="6437376"/>
+            <a:ext cx="5486400" cy="274320"/>
+          </a:xfrm>
+          <a:prstGeom prst="rect">
+            <a:avLst/>
+          </a:prstGeom>
+          <a:noFill/>
+        </p:spPr>
+        <p:txBody>
+          <a:bodyPr wrap="square" lIns="54864" rIns="54864" tIns="27432" bIns="27432" anchor="ctr">
+            <a:noAutofit/>
+          </a:bodyPr>
+          <a:lstStyle/>
+          <a:p>
+            <a:pPr algn="l">
+              <a:lnSpc>
+                <a:spcPct val="115000"/>
+              </a:lnSpc>
+            </a:pPr>
+            <a:r>
+              <a:rPr sz="900" b="1" i="0" spc="250">
+                <a:solidFill>
+                  <a:srgbClr val="26231F"/>
+                </a:solidFill>
+              </a:rPr>
+              <a:t>WEDDING</a:t>
+            </a:r>
+          </a:p>
+        </p:txBody>
+      </p:sp>
+      <p:sp>
+        <p:nvSpPr>
+          <p:cNvPr id="5" name="포인트"/>
           <p:cNvSpPr/>
           <p:nvPr/>
         </p:nvSpPr>
         <p:spPr>
           <a:xfrm>
-            <a:off x="-182880" y="6400800"/>
-            <a:ext cx="12557455" cy="502920"/>
-          </a:xfrm>
-          <a:prstGeom prst="wave">
+            <a:off x="11213287" y="6473952"/>
+            <a:ext cx="219456" cy="219456"/>
+          </a:xfrm>
+          <a:prstGeom prst="donut">
             <a:avLst/>
           </a:prstGeom>
           <a:solidFill>
-            <a:srgbClr val="4D26C5"/>
+            <a:srgbClr val="977BEA"/>
           </a:solidFill>
           <a:ln>
             <a:noFill/>
@@ -4236,8 +4443,8 @@
         </p:nvSpPr>
         <p:spPr>
           <a:xfrm>
-            <a:off x="640080" y="457200"/>
-            <a:ext cx="9722815" cy="868680"/>
+            <a:off x="640080" y="502920"/>
+            <a:ext cx="10911535" cy="914400"/>
           </a:xfrm>
         </p:spPr>
         <p:txBody>
@@ -4254,7 +4461,7 @@
             <a:r>
               <a:rPr sz="3000" b="1" i="0">
                 <a:solidFill>
-                  <a:srgbClr val="24115F"/>
+                  <a:srgbClr val="26231F"/>
                 </a:solidFill>
               </a:rPr>
               <a:t>답례 안내</a:t>
@@ -4264,26 +4471,26 @@
       </p:sp>
       <p:sp>
         <p:nvSpPr>
-          <p:cNvPr id="5" name="카드 1"/>
+          <p:cNvPr id="6" name="카드 1"/>
           <p:cNvSpPr/>
           <p:nvPr/>
         </p:nvSpPr>
         <p:spPr>
           <a:xfrm>
-            <a:off x="640080" y="1554480"/>
-            <a:ext cx="3484778" cy="4389120"/>
+            <a:off x="640080" y="1600200"/>
+            <a:ext cx="3484778" cy="4572000"/>
           </a:xfrm>
           <a:prstGeom prst="roundRect">
             <a:avLst>
-              <a:gd name="adj" fmla="val 8000"/>
+              <a:gd name="adj" fmla="val 7000"/>
             </a:avLst>
           </a:prstGeom>
           <a:solidFill>
-            <a:srgbClr val="F1EEFC"/>
+            <a:srgbClr val="FFFFFF"/>
           </a:solidFill>
-          <a:ln w="15875">
+          <a:ln w="12700">
             <a:solidFill>
-              <a:srgbClr val="DBD1FA"/>
+              <a:srgbClr val="B8A5F3"/>
             </a:solidFill>
           </a:ln>
         </p:spPr>
@@ -4297,20 +4504,22 @@
       </p:sp>
       <p:sp>
         <p:nvSpPr>
-          <p:cNvPr id="6" name="번호 1"/>
+          <p:cNvPr id="7" name="번호 1"/>
           <p:cNvSpPr/>
           <p:nvPr/>
         </p:nvSpPr>
         <p:spPr>
           <a:xfrm>
-            <a:off x="822959" y="1737360"/>
+            <a:off x="822959" y="1783080"/>
             <a:ext cx="457200" cy="457200"/>
           </a:xfrm>
-          <a:prstGeom prst="ellipse">
-            <a:avLst/>
+          <a:prstGeom prst="roundRect">
+            <a:avLst>
+              <a:gd name="adj" fmla="val 25000"/>
+            </a:avLst>
           </a:prstGeom>
           <a:solidFill>
-            <a:srgbClr val="4D26C5"/>
+            <a:srgbClr val="977BEA"/>
           </a:solidFill>
           <a:ln>
             <a:noFill/>
@@ -4330,7 +4539,7 @@
             <a:r>
               <a:rPr sz="1600" b="1" i="0">
                 <a:solidFill>
-                  <a:srgbClr val="FFFFFF"/>
+                  <a:srgbClr val="26231F"/>
                 </a:solidFill>
               </a:rPr>
               <a:t>1</a:t>
@@ -4340,13 +4549,13 @@
       </p:sp>
       <p:sp>
         <p:nvSpPr>
-          <p:cNvPr id="7" name="TextBox 6"/>
+          <p:cNvPr id="8" name="TextBox 7"/>
           <p:cNvSpPr txBox="1"/>
           <p:nvPr/>
         </p:nvSpPr>
         <p:spPr>
           <a:xfrm>
-            <a:off x="777240" y="2331720"/>
+            <a:off x="777240" y="2377440"/>
             <a:ext cx="3210458" cy="640080"/>
           </a:xfrm>
           <a:prstGeom prst="rect">
@@ -4368,7 +4577,7 @@
             <a:r>
               <a:rPr sz="1800" b="1" i="0">
                 <a:solidFill>
-                  <a:srgbClr val="24115F"/>
+                  <a:srgbClr val="302749"/>
                 </a:solidFill>
               </a:rPr>
               <a:t>답례품</a:t>
@@ -4378,14 +4587,14 @@
       </p:sp>
       <p:sp>
         <p:nvSpPr>
-          <p:cNvPr id="8" name="TextBox 7"/>
+          <p:cNvPr id="9" name="TextBox 8"/>
           <p:cNvSpPr txBox="1"/>
           <p:nvPr/>
         </p:nvSpPr>
         <p:spPr>
           <a:xfrm>
-            <a:off x="777240" y="3017520"/>
-            <a:ext cx="3210458" cy="2788920"/>
+            <a:off x="777240" y="3063240"/>
+            <a:ext cx="3210458" cy="2971800"/>
           </a:xfrm>
           <a:prstGeom prst="rect">
             <a:avLst/>
@@ -4406,7 +4615,7 @@
             <a:r>
               <a:rPr sz="1500" b="0" i="0">
                 <a:solidFill>
-                  <a:srgbClr val="2B2B2B"/>
+                  <a:srgbClr val="26231F"/>
                 </a:solidFill>
               </a:rPr>
               <a:t>입력하세요</a:t>
@@ -4416,26 +4625,26 @@
       </p:sp>
       <p:sp>
         <p:nvSpPr>
-          <p:cNvPr id="9" name="카드 2"/>
+          <p:cNvPr id="10" name="카드 2"/>
           <p:cNvSpPr/>
           <p:nvPr/>
         </p:nvSpPr>
         <p:spPr>
           <a:xfrm>
-            <a:off x="4353458" y="1554480"/>
-            <a:ext cx="3484778" cy="4389120"/>
+            <a:off x="4353458" y="1600200"/>
+            <a:ext cx="3484778" cy="4572000"/>
           </a:xfrm>
           <a:prstGeom prst="roundRect">
             <a:avLst>
-              <a:gd name="adj" fmla="val 8000"/>
+              <a:gd name="adj" fmla="val 7000"/>
             </a:avLst>
           </a:prstGeom>
           <a:solidFill>
-            <a:srgbClr val="F1EEFC"/>
+            <a:srgbClr val="FFFFFF"/>
           </a:solidFill>
-          <a:ln w="15875">
+          <a:ln w="12700">
             <a:solidFill>
-              <a:srgbClr val="DBD1FA"/>
+              <a:srgbClr val="B8A5F3"/>
             </a:solidFill>
           </a:ln>
         </p:spPr>
@@ -4449,20 +4658,22 @@
       </p:sp>
       <p:sp>
         <p:nvSpPr>
-          <p:cNvPr id="10" name="번호 2"/>
+          <p:cNvPr id="11" name="번호 2"/>
           <p:cNvSpPr/>
           <p:nvPr/>
         </p:nvSpPr>
         <p:spPr>
           <a:xfrm>
-            <a:off x="4536338" y="1737360"/>
+            <a:off x="4536338" y="1783080"/>
             <a:ext cx="457200" cy="457200"/>
           </a:xfrm>
-          <a:prstGeom prst="ellipse">
-            <a:avLst/>
+          <a:prstGeom prst="roundRect">
+            <a:avLst>
+              <a:gd name="adj" fmla="val 25000"/>
+            </a:avLst>
           </a:prstGeom>
           <a:solidFill>
-            <a:srgbClr val="4D26C5"/>
+            <a:srgbClr val="977BEA"/>
           </a:solidFill>
           <a:ln>
             <a:noFill/>
@@ -4482,7 +4693,7 @@
             <a:r>
               <a:rPr sz="1600" b="1" i="0">
                 <a:solidFill>
-                  <a:srgbClr val="FFFFFF"/>
+                  <a:srgbClr val="26231F"/>
                 </a:solidFill>
               </a:rPr>
               <a:t>2</a:t>
@@ -4492,13 +4703,13 @@
       </p:sp>
       <p:sp>
         <p:nvSpPr>
-          <p:cNvPr id="11" name="TextBox 10"/>
+          <p:cNvPr id="12" name="TextBox 11"/>
           <p:cNvSpPr txBox="1"/>
           <p:nvPr/>
         </p:nvSpPr>
         <p:spPr>
           <a:xfrm>
-            <a:off x="4490618" y="2331720"/>
+            <a:off x="4490618" y="2377440"/>
             <a:ext cx="3210458" cy="640080"/>
           </a:xfrm>
           <a:prstGeom prst="rect">
@@ -4520,7 +4731,7 @@
             <a:r>
               <a:rPr sz="1800" b="1" i="0">
                 <a:solidFill>
-                  <a:srgbClr val="24115F"/>
+                  <a:srgbClr val="302749"/>
                 </a:solidFill>
               </a:rPr>
               <a:t>방명록</a:t>
@@ -4530,14 +4741,14 @@
       </p:sp>
       <p:sp>
         <p:nvSpPr>
-          <p:cNvPr id="12" name="TextBox 11"/>
+          <p:cNvPr id="13" name="TextBox 12"/>
           <p:cNvSpPr txBox="1"/>
           <p:nvPr/>
         </p:nvSpPr>
         <p:spPr>
           <a:xfrm>
-            <a:off x="4490618" y="3017520"/>
-            <a:ext cx="3210458" cy="2788920"/>
+            <a:off x="4490618" y="3063240"/>
+            <a:ext cx="3210458" cy="2971800"/>
           </a:xfrm>
           <a:prstGeom prst="rect">
             <a:avLst/>
@@ -4558,7 +4769,7 @@
             <a:r>
               <a:rPr sz="1500" b="0" i="0">
                 <a:solidFill>
-                  <a:srgbClr val="2B2B2B"/>
+                  <a:srgbClr val="26231F"/>
                 </a:solidFill>
               </a:rPr>
               <a:t>입력하세요</a:t>
@@ -4568,26 +4779,26 @@
       </p:sp>
       <p:sp>
         <p:nvSpPr>
-          <p:cNvPr id="13" name="카드 3"/>
+          <p:cNvPr id="14" name="카드 3"/>
           <p:cNvSpPr/>
           <p:nvPr/>
         </p:nvSpPr>
         <p:spPr>
           <a:xfrm>
-            <a:off x="8066836" y="1554480"/>
-            <a:ext cx="3484778" cy="4389120"/>
+            <a:off x="8066836" y="1600200"/>
+            <a:ext cx="3484778" cy="4572000"/>
           </a:xfrm>
           <a:prstGeom prst="roundRect">
             <a:avLst>
-              <a:gd name="adj" fmla="val 8000"/>
+              <a:gd name="adj" fmla="val 7000"/>
             </a:avLst>
           </a:prstGeom>
           <a:solidFill>
-            <a:srgbClr val="F1EEFC"/>
+            <a:srgbClr val="FFFFFF"/>
           </a:solidFill>
-          <a:ln w="15875">
+          <a:ln w="12700">
             <a:solidFill>
-              <a:srgbClr val="DBD1FA"/>
+              <a:srgbClr val="B8A5F3"/>
             </a:solidFill>
           </a:ln>
         </p:spPr>
@@ -4601,20 +4812,22 @@
       </p:sp>
       <p:sp>
         <p:nvSpPr>
-          <p:cNvPr id="14" name="번호 3"/>
+          <p:cNvPr id="15" name="번호 3"/>
           <p:cNvSpPr/>
           <p:nvPr/>
         </p:nvSpPr>
         <p:spPr>
           <a:xfrm>
-            <a:off x="8249716" y="1737360"/>
+            <a:off x="8249716" y="1783080"/>
             <a:ext cx="457200" cy="457200"/>
           </a:xfrm>
-          <a:prstGeom prst="ellipse">
-            <a:avLst/>
+          <a:prstGeom prst="roundRect">
+            <a:avLst>
+              <a:gd name="adj" fmla="val 25000"/>
+            </a:avLst>
           </a:prstGeom>
           <a:solidFill>
-            <a:srgbClr val="4D26C5"/>
+            <a:srgbClr val="977BEA"/>
           </a:solidFill>
           <a:ln>
             <a:noFill/>
@@ -4634,7 +4847,7 @@
             <a:r>
               <a:rPr sz="1600" b="1" i="0">
                 <a:solidFill>
-                  <a:srgbClr val="FFFFFF"/>
+                  <a:srgbClr val="26231F"/>
                 </a:solidFill>
               </a:rPr>
               <a:t>3</a:t>
@@ -4644,13 +4857,13 @@
       </p:sp>
       <p:sp>
         <p:nvSpPr>
-          <p:cNvPr id="15" name="TextBox 14"/>
+          <p:cNvPr id="16" name="TextBox 15"/>
           <p:cNvSpPr txBox="1"/>
           <p:nvPr/>
         </p:nvSpPr>
         <p:spPr>
           <a:xfrm>
-            <a:off x="8203996" y="2331720"/>
+            <a:off x="8203996" y="2377440"/>
             <a:ext cx="3210458" cy="640080"/>
           </a:xfrm>
           <a:prstGeom prst="rect">
@@ -4672,7 +4885,7 @@
             <a:r>
               <a:rPr sz="1800" b="1" i="0">
                 <a:solidFill>
-                  <a:srgbClr val="24115F"/>
+                  <a:srgbClr val="302749"/>
                 </a:solidFill>
               </a:rPr>
               <a:t>사진 · 영상</a:t>
@@ -4682,14 +4895,14 @@
       </p:sp>
       <p:sp>
         <p:nvSpPr>
-          <p:cNvPr id="16" name="TextBox 15"/>
+          <p:cNvPr id="17" name="TextBox 16"/>
           <p:cNvSpPr txBox="1"/>
           <p:nvPr/>
         </p:nvSpPr>
         <p:spPr>
           <a:xfrm>
-            <a:off x="8203996" y="3017520"/>
-            <a:ext cx="3210458" cy="2788920"/>
+            <a:off x="8203996" y="3063240"/>
+            <a:ext cx="3210458" cy="2971800"/>
           </a:xfrm>
           <a:prstGeom prst="rect">
             <a:avLst/>
@@ -4710,7 +4923,7 @@
             <a:r>
               <a:rPr sz="1500" b="0" i="0">
                 <a:solidFill>
-                  <a:srgbClr val="2B2B2B"/>
+                  <a:srgbClr val="26231F"/>
                 </a:solidFill>
               </a:rPr>
               <a:t>입력하세요</a:t>
@@ -4752,14 +4965,14 @@
         </p:nvSpPr>
         <p:spPr>
           <a:xfrm>
-            <a:off x="-182880" y="6144768"/>
-            <a:ext cx="12557455" cy="731520"/>
-          </a:xfrm>
-          <a:prstGeom prst="wave">
+            <a:off x="640080" y="6400800"/>
+            <a:ext cx="10911535" cy="10972"/>
+          </a:xfrm>
+          <a:prstGeom prst="rect">
             <a:avLst/>
           </a:prstGeom>
           <a:solidFill>
-            <a:srgbClr val="DBD1FA"/>
+            <a:srgbClr val="26231F"/>
           </a:solidFill>
           <a:ln>
             <a:noFill/>
@@ -4775,20 +4988,58 @@
       </p:sp>
       <p:sp>
         <p:nvSpPr>
-          <p:cNvPr id="4" name="장식"/>
+          <p:cNvPr id="4" name="하단 라벨"/>
+          <p:cNvSpPr txBox="1"/>
+          <p:nvPr/>
+        </p:nvSpPr>
+        <p:spPr>
+          <a:xfrm>
+            <a:off x="640080" y="6437376"/>
+            <a:ext cx="5486400" cy="274320"/>
+          </a:xfrm>
+          <a:prstGeom prst="rect">
+            <a:avLst/>
+          </a:prstGeom>
+          <a:noFill/>
+        </p:spPr>
+        <p:txBody>
+          <a:bodyPr wrap="square" lIns="54864" rIns="54864" tIns="27432" bIns="27432" anchor="ctr">
+            <a:noAutofit/>
+          </a:bodyPr>
+          <a:lstStyle/>
+          <a:p>
+            <a:pPr algn="l">
+              <a:lnSpc>
+                <a:spcPct val="115000"/>
+              </a:lnSpc>
+            </a:pPr>
+            <a:r>
+              <a:rPr sz="900" b="1" i="0" spc="250">
+                <a:solidFill>
+                  <a:srgbClr val="26231F"/>
+                </a:solidFill>
+              </a:rPr>
+              <a:t>WEDDING</a:t>
+            </a:r>
+          </a:p>
+        </p:txBody>
+      </p:sp>
+      <p:sp>
+        <p:nvSpPr>
+          <p:cNvPr id="5" name="포인트"/>
           <p:cNvSpPr/>
           <p:nvPr/>
         </p:nvSpPr>
         <p:spPr>
           <a:xfrm>
-            <a:off x="-182880" y="6400800"/>
-            <a:ext cx="12557455" cy="502920"/>
-          </a:xfrm>
-          <a:prstGeom prst="wave">
+            <a:off x="11213287" y="6473952"/>
+            <a:ext cx="219456" cy="219456"/>
+          </a:xfrm>
+          <a:prstGeom prst="donut">
             <a:avLst/>
           </a:prstGeom>
           <a:solidFill>
-            <a:srgbClr val="4D26C5"/>
+            <a:srgbClr val="977BEA"/>
           </a:solidFill>
           <a:ln>
             <a:noFill/>
@@ -4814,8 +5065,8 @@
         </p:nvSpPr>
         <p:spPr>
           <a:xfrm>
-            <a:off x="640080" y="457200"/>
-            <a:ext cx="9722815" cy="868680"/>
+            <a:off x="640080" y="502920"/>
+            <a:ext cx="10911535" cy="914400"/>
           </a:xfrm>
         </p:spPr>
         <p:txBody>
@@ -4832,7 +5083,7 @@
             <a:r>
               <a:rPr sz="3000" b="1" i="0">
                 <a:solidFill>
-                  <a:srgbClr val="24115F"/>
+                  <a:srgbClr val="26231F"/>
                 </a:solidFill>
               </a:rPr>
               <a:t>웨딩 사진</a:t>
@@ -4842,14 +5093,14 @@
       </p:sp>
       <p:sp>
         <p:nvSpPr>
-          <p:cNvPr id="5" name="사진 자리"/>
+          <p:cNvPr id="6" name="사진 자리"/>
           <p:cNvSpPr/>
           <p:nvPr/>
         </p:nvSpPr>
         <p:spPr>
           <a:xfrm>
-            <a:off x="640080" y="1554480"/>
-            <a:ext cx="3515258" cy="2103120"/>
+            <a:off x="640080" y="1600200"/>
+            <a:ext cx="3515258" cy="2194560"/>
           </a:xfrm>
           <a:prstGeom prst="roundRect">
             <a:avLst>
@@ -4860,9 +5111,7 @@
             <a:srgbClr val="DBD1FA"/>
           </a:solidFill>
           <a:ln w="19050">
-            <a:solidFill>
-              <a:srgbClr val="4D26C5"/>
-            </a:solidFill>
+            <a:noFill/>
             <a:prstDash val="dash"/>
           </a:ln>
         </p:spPr>
@@ -4880,7 +5129,7 @@
             <a:r>
               <a:rPr sz="1200" b="0" i="0">
                 <a:solidFill>
-                  <a:srgbClr val="24115F"/>
+                  <a:srgbClr val="8E8780"/>
                 </a:solidFill>
               </a:rPr>
               <a:t>사진 1</a:t>
@@ -4890,14 +5139,14 @@
       </p:sp>
       <p:sp>
         <p:nvSpPr>
-          <p:cNvPr id="6" name="사진 자리"/>
+          <p:cNvPr id="7" name="사진 자리"/>
           <p:cNvSpPr/>
           <p:nvPr/>
         </p:nvSpPr>
         <p:spPr>
           <a:xfrm>
-            <a:off x="4338218" y="1554480"/>
-            <a:ext cx="3515258" cy="2103120"/>
+            <a:off x="4338218" y="1600200"/>
+            <a:ext cx="3515258" cy="2194560"/>
           </a:xfrm>
           <a:prstGeom prst="roundRect">
             <a:avLst>
@@ -4908,9 +5157,7 @@
             <a:srgbClr val="DBD1FA"/>
           </a:solidFill>
           <a:ln w="19050">
-            <a:solidFill>
-              <a:srgbClr val="4D26C5"/>
-            </a:solidFill>
+            <a:noFill/>
             <a:prstDash val="dash"/>
           </a:ln>
         </p:spPr>
@@ -4928,7 +5175,7 @@
             <a:r>
               <a:rPr sz="1200" b="0" i="0">
                 <a:solidFill>
-                  <a:srgbClr val="24115F"/>
+                  <a:srgbClr val="8E8780"/>
                 </a:solidFill>
               </a:rPr>
               <a:t>사진 2</a:t>
@@ -4938,14 +5185,14 @@
       </p:sp>
       <p:sp>
         <p:nvSpPr>
-          <p:cNvPr id="7" name="사진 자리"/>
+          <p:cNvPr id="8" name="사진 자리"/>
           <p:cNvSpPr/>
           <p:nvPr/>
         </p:nvSpPr>
         <p:spPr>
           <a:xfrm>
-            <a:off x="8036356" y="1554480"/>
-            <a:ext cx="3515258" cy="2103120"/>
+            <a:off x="8036356" y="1600200"/>
+            <a:ext cx="3515258" cy="2194560"/>
           </a:xfrm>
           <a:prstGeom prst="roundRect">
             <a:avLst>
@@ -4956,9 +5203,7 @@
             <a:srgbClr val="DBD1FA"/>
           </a:solidFill>
           <a:ln w="19050">
-            <a:solidFill>
-              <a:srgbClr val="4D26C5"/>
-            </a:solidFill>
+            <a:noFill/>
             <a:prstDash val="dash"/>
           </a:ln>
         </p:spPr>
@@ -4976,7 +5221,7 @@
             <a:r>
               <a:rPr sz="1200" b="0" i="0">
                 <a:solidFill>
-                  <a:srgbClr val="24115F"/>
+                  <a:srgbClr val="8E8780"/>
                 </a:solidFill>
               </a:rPr>
               <a:t>사진 3</a:t>
@@ -4986,14 +5231,14 @@
       </p:sp>
       <p:sp>
         <p:nvSpPr>
-          <p:cNvPr id="8" name="사진 자리"/>
+          <p:cNvPr id="9" name="사진 자리"/>
           <p:cNvSpPr/>
           <p:nvPr/>
         </p:nvSpPr>
         <p:spPr>
           <a:xfrm>
-            <a:off x="640080" y="3840480"/>
-            <a:ext cx="3515258" cy="2103120"/>
+            <a:off x="640080" y="3977639"/>
+            <a:ext cx="3515258" cy="2194560"/>
           </a:xfrm>
           <a:prstGeom prst="roundRect">
             <a:avLst>
@@ -5004,9 +5249,7 @@
             <a:srgbClr val="DBD1FA"/>
           </a:solidFill>
           <a:ln w="19050">
-            <a:solidFill>
-              <a:srgbClr val="4D26C5"/>
-            </a:solidFill>
+            <a:noFill/>
             <a:prstDash val="dash"/>
           </a:ln>
         </p:spPr>
@@ -5024,7 +5267,7 @@
             <a:r>
               <a:rPr sz="1200" b="0" i="0">
                 <a:solidFill>
-                  <a:srgbClr val="24115F"/>
+                  <a:srgbClr val="8E8780"/>
                 </a:solidFill>
               </a:rPr>
               <a:t>사진 4</a:t>
@@ -5034,14 +5277,14 @@
       </p:sp>
       <p:sp>
         <p:nvSpPr>
-          <p:cNvPr id="9" name="사진 자리"/>
+          <p:cNvPr id="10" name="사진 자리"/>
           <p:cNvSpPr/>
           <p:nvPr/>
         </p:nvSpPr>
         <p:spPr>
           <a:xfrm>
-            <a:off x="4338218" y="3840480"/>
-            <a:ext cx="3515258" cy="2103120"/>
+            <a:off x="4338218" y="3977639"/>
+            <a:ext cx="3515258" cy="2194560"/>
           </a:xfrm>
           <a:prstGeom prst="roundRect">
             <a:avLst>
@@ -5052,9 +5295,7 @@
             <a:srgbClr val="DBD1FA"/>
           </a:solidFill>
           <a:ln w="19050">
-            <a:solidFill>
-              <a:srgbClr val="4D26C5"/>
-            </a:solidFill>
+            <a:noFill/>
             <a:prstDash val="dash"/>
           </a:ln>
         </p:spPr>
@@ -5072,7 +5313,7 @@
             <a:r>
               <a:rPr sz="1200" b="0" i="0">
                 <a:solidFill>
-                  <a:srgbClr val="24115F"/>
+                  <a:srgbClr val="8E8780"/>
                 </a:solidFill>
               </a:rPr>
               <a:t>사진 5</a:t>
@@ -5082,14 +5323,14 @@
       </p:sp>
       <p:sp>
         <p:nvSpPr>
-          <p:cNvPr id="10" name="사진 자리"/>
+          <p:cNvPr id="11" name="사진 자리"/>
           <p:cNvSpPr/>
           <p:nvPr/>
         </p:nvSpPr>
         <p:spPr>
           <a:xfrm>
-            <a:off x="8036356" y="3840480"/>
-            <a:ext cx="3515258" cy="2103120"/>
+            <a:off x="8036356" y="3977639"/>
+            <a:ext cx="3515258" cy="2194560"/>
           </a:xfrm>
           <a:prstGeom prst="roundRect">
             <a:avLst>
@@ -5100,9 +5341,7 @@
             <a:srgbClr val="DBD1FA"/>
           </a:solidFill>
           <a:ln w="19050">
-            <a:solidFill>
-              <a:srgbClr val="4D26C5"/>
-            </a:solidFill>
+            <a:noFill/>
             <a:prstDash val="dash"/>
           </a:ln>
         </p:spPr>
@@ -5120,7 +5359,7 @@
             <a:r>
               <a:rPr sz="1200" b="0" i="0">
                 <a:solidFill>
-                  <a:srgbClr val="24115F"/>
+                  <a:srgbClr val="8E8780"/>
                 </a:solidFill>
               </a:rPr>
               <a:t>사진 6</a:t>
@@ -5139,6 +5378,14 @@
 <file path=ppt/slides/slide6.xml><?xml version="1.0" encoding="utf-8"?>
 <p:sld xmlns:a="http://schemas.openxmlformats.org/drawingml/2006/main" xmlns:p="http://schemas.openxmlformats.org/presentationml/2006/main" xmlns:r="http://schemas.openxmlformats.org/officeDocument/2006/relationships">
   <p:cSld>
+    <p:bg>
+      <p:bgPr>
+        <a:solidFill>
+          <a:srgbClr val="EFEAFD"/>
+        </a:solidFill>
+        <a:effectLst/>
+      </p:bgPr>
+    </p:bg>
     <p:spTree>
       <p:nvGrpSpPr>
         <p:cNvPr id="1" name=""/>
@@ -5146,30 +5393,119 @@
         <p:nvPr/>
       </p:nvGrpSpPr>
       <p:grpSpPr/>
-      <p:pic>
-        <p:nvPicPr>
-          <p:cNvPr id="3" name="표지 그림" descr="wedding-15.jpg"/>
-          <p:cNvPicPr>
-            <a:picLocks noChangeAspect="1"/>
-          </p:cNvPicPr>
+      <p:sp>
+        <p:nvSpPr>
+          <p:cNvPr id="3" name="사진 자리"/>
+          <p:cNvSpPr/>
           <p:nvPr/>
-        </p:nvPicPr>
-        <p:blipFill>
-          <a:blip r:embed="rId2"/>
-          <a:stretch>
-            <a:fillRect/>
-          </a:stretch>
-        </p:blipFill>
-        <p:spPr>
-          <a:xfrm>
-            <a:off x="0" y="0"/>
-            <a:ext cx="12191695" cy="6858000"/>
+        </p:nvSpPr>
+        <p:spPr>
+          <a:xfrm>
+            <a:off x="1463003" y="685800"/>
+            <a:ext cx="3169840" cy="5486400"/>
+          </a:xfrm>
+          <a:prstGeom prst="round2SameRect">
+            <a:avLst>
+              <a:gd name="adj1" fmla="val 50000"/>
+              <a:gd name="adj2" fmla="val 0"/>
+            </a:avLst>
+          </a:prstGeom>
+          <a:solidFill>
+            <a:srgbClr val="B8A5F3"/>
+          </a:solidFill>
+          <a:ln>
+            <a:noFill/>
+          </a:ln>
+        </p:spPr>
+        <p:txBody>
+          <a:bodyPr rtlCol="0" anchor="ctr" wrap="square" lIns="54864" rIns="54864" tIns="27432" bIns="27432">
+            <a:noAutofit/>
+          </a:bodyPr>
+          <a:lstStyle/>
+          <a:p>
+            <a:pPr algn="ctr">
+              <a:lnSpc>
+                <a:spcPct val="100000"/>
+              </a:lnSpc>
+            </a:pPr>
+            <a:r>
+              <a:rPr sz="1400" b="0" i="0">
+                <a:solidFill>
+                  <a:srgbClr val="302749"/>
+                </a:solidFill>
+              </a:rPr>
+              <a:t>사진을 넣어 주세요</a:t>
+            </a:r>
+          </a:p>
+        </p:txBody>
+      </p:sp>
+      <p:sp>
+        <p:nvSpPr>
+          <p:cNvPr id="4" name="장식"/>
+          <p:cNvSpPr/>
+          <p:nvPr/>
+        </p:nvSpPr>
+        <p:spPr>
+          <a:xfrm>
+            <a:off x="4358505" y="4251960"/>
+            <a:ext cx="1005840" cy="1005840"/>
+          </a:xfrm>
+          <a:prstGeom prst="ellipse">
+            <a:avLst/>
+          </a:prstGeom>
+          <a:solidFill>
+            <a:srgbClr val="B8A5F3"/>
+          </a:solidFill>
+          <a:ln>
+            <a:noFill/>
+          </a:ln>
+        </p:spPr>
+        <p:txBody>
+          <a:bodyPr rtlCol="0" anchor="ctr"/>
+          <a:lstStyle/>
+          <a:p>
+            <a:pPr algn="ctr"/>
+          </a:p>
+        </p:txBody>
+      </p:sp>
+      <p:sp>
+        <p:nvSpPr>
+          <p:cNvPr id="5" name="라벨"/>
+          <p:cNvSpPr txBox="1"/>
+          <p:nvPr/>
+        </p:nvSpPr>
+        <p:spPr>
+          <a:xfrm>
+            <a:off x="6827349" y="2148840"/>
+            <a:ext cx="4632844" cy="274320"/>
           </a:xfrm>
           <a:prstGeom prst="rect">
             <a:avLst/>
           </a:prstGeom>
-        </p:spPr>
-      </p:pic>
+          <a:noFill/>
+        </p:spPr>
+        <p:txBody>
+          <a:bodyPr wrap="square" lIns="54864" rIns="54864" tIns="27432" bIns="27432" anchor="t">
+            <a:noAutofit/>
+          </a:bodyPr>
+          <a:lstStyle/>
+          <a:p>
+            <a:pPr algn="l">
+              <a:lnSpc>
+                <a:spcPct val="115000"/>
+              </a:lnSpc>
+            </a:pPr>
+            <a:r>
+              <a:rPr sz="1000" b="1" i="0" spc="250">
+                <a:solidFill>
+                  <a:srgbClr val="26231F"/>
+                </a:solidFill>
+              </a:rPr>
+              <a:t>WEDDING</a:t>
+            </a:r>
+          </a:p>
+        </p:txBody>
+      </p:sp>
       <p:sp>
         <p:nvSpPr>
           <p:cNvPr id="2" name="Title 1"/>
@@ -5182,8 +5518,8 @@
         </p:nvSpPr>
         <p:spPr>
           <a:xfrm>
-            <a:off x="853418" y="2057400"/>
-            <a:ext cx="6095847" cy="1554480"/>
+            <a:off x="6827349" y="2606040"/>
+            <a:ext cx="4632844" cy="1188720"/>
           </a:xfrm>
         </p:spPr>
         <p:txBody>
@@ -5200,7 +5536,7 @@
             <a:r>
               <a:rPr sz="3400" b="1" i="0">
                 <a:solidFill>
-                  <a:srgbClr val="24115F"/>
+                  <a:srgbClr val="26231F"/>
                 </a:solidFill>
               </a:rPr>
               <a:t>와 주셔서 고맙습니다</a:t>
@@ -5210,14 +5546,14 @@
       </p:sp>
       <p:sp>
         <p:nvSpPr>
-          <p:cNvPr id="4" name="한 줄 문구"/>
+          <p:cNvPr id="6" name="한 줄 문구"/>
           <p:cNvSpPr txBox="1"/>
           <p:nvPr/>
         </p:nvSpPr>
         <p:spPr>
           <a:xfrm>
-            <a:off x="853418" y="3749039"/>
-            <a:ext cx="6095847" cy="822960"/>
+            <a:off x="6827349" y="3886200"/>
+            <a:ext cx="4632844" cy="822960"/>
           </a:xfrm>
           <a:prstGeom prst="rect">
             <a:avLst/>
@@ -5236,9 +5572,9 @@
               </a:lnSpc>
             </a:pPr>
             <a:r>
-              <a:rPr sz="1700" b="0" i="1">
-                <a:solidFill>
-                  <a:srgbClr val="24115F"/>
+              <a:rPr sz="1700" b="0" i="0">
+                <a:solidFill>
+                  <a:srgbClr val="26231F"/>
                 </a:solidFill>
               </a:rPr>
               <a:t>잘 살겠습니다</a:t>
@@ -5248,14 +5584,14 @@
       </p:sp>
       <p:sp>
         <p:nvSpPr>
-          <p:cNvPr id="5" name="안내 문구"/>
+          <p:cNvPr id="7" name="안내 문구"/>
           <p:cNvSpPr txBox="1"/>
           <p:nvPr/>
         </p:nvSpPr>
         <p:spPr>
           <a:xfrm>
-            <a:off x="853418" y="4617720"/>
-            <a:ext cx="6095847" cy="914400"/>
+            <a:off x="6827349" y="4754880"/>
+            <a:ext cx="4632844" cy="914400"/>
           </a:xfrm>
           <a:prstGeom prst="rect">
             <a:avLst/>
@@ -5276,7 +5612,7 @@
             <a:r>
               <a:rPr sz="1400" b="0" i="0">
                 <a:solidFill>
-                  <a:srgbClr val="666666"/>
+                  <a:srgbClr val="26231F"/>
                 </a:solidFill>
               </a:rPr>
               <a:t>신랑 이름 ♥ 신부 이름</a:t>
@@ -5303,34 +5639,34 @@
         <a:sysClr val="window" lastClr="FFFFFF"/>
       </a:lt1>
       <a:dk2>
-        <a:srgbClr val="24115F"/>
+        <a:srgbClr val="302749"/>
       </a:dk2>
       <a:lt2>
-        <a:srgbClr val="F1EEFC"/>
+        <a:srgbClr val="EFEAFD"/>
       </a:lt2>
       <a:accent1>
-        <a:srgbClr val="4D26C5"/>
+        <a:srgbClr val="977BEA"/>
       </a:accent1>
       <a:accent2>
-        <a:srgbClr val="209DB6"/>
+        <a:srgbClr val="D89FEF"/>
       </a:accent2>
       <a:accent3>
-        <a:srgbClr val="24115F"/>
+        <a:srgbClr val="302749"/>
       </a:accent3>
       <a:accent4>
         <a:srgbClr val="DBD1FA"/>
       </a:accent4>
       <a:accent5>
-        <a:srgbClr val="3662BE"/>
+        <a:srgbClr val="B88DEC"/>
       </a:accent5>
       <a:accent6>
-        <a:srgbClr val="7C709F"/>
+        <a:srgbClr val="837D92"/>
       </a:accent6>
       <a:hlink>
-        <a:srgbClr val="4D26C5"/>
+        <a:srgbClr val="977BEA"/>
       </a:hlink>
       <a:folHlink>
-        <a:srgbClr val="24115F"/>
+        <a:srgbClr val="302749"/>
       </a:folHlink>
     </a:clrScheme>
     <a:fontScheme name="Office">
